--- a/decks/combined-circuits/combined-circuits_ch4_component-characteristics.pptx
+++ b/decks/combined-circuits/combined-circuits_ch4_component-characteristics.pptx
@@ -122,48 +122,48 @@
   <p:extLst>
     <p:ext uri="{521415D9-36F7-43E2-AB2F-B90AF26B5E84}">
       <p14:sectionLst xmlns:p14="http://schemas.microsoft.com/office/powerpoint/2010/main">
-        <p14:section name="Opening" id="{18b74413-0237-ec09-efc2-5747bbe8ec2b}">
+        <p14:section name="Opening" id="{20d62b8d-4474-2a73-4090-3af0632e4c29}">
           <p14:sldIdLst>
             <p14:sldId id="256"/>
           </p14:sldIdLst>
         </p14:section>
-        <p14:section name="Gate" id="{14a8e3a5-7d99-3338-d9ed-4e5f68827efe}">
+        <p14:section name="Gate" id="{5c86df6d-de45-ac54-8b25-0d4957ec001a}">
           <p14:sldIdLst>
             <p14:sldId id="257"/>
             <p14:sldId id="258"/>
           </p14:sldIdLst>
         </p14:section>
-        <p14:section name="Pre-teach" id="{13121394-3dfd-d913-6b3a-73f75cdd52d8}">
+        <p14:section name="Pre-teach" id="{284662ee-9ed4-f25f-8cf4-4b41b87f3ec8}">
           <p14:sldIdLst>
             <p14:sldId id="259"/>
             <p14:sldId id="260"/>
           </p14:sldIdLst>
         </p14:section>
-        <p14:section name="Read-along" id="{34fff44f-8095-bd77-b017-c4636a61affd}">
+        <p14:section name="Read-along" id="{63bdd54a-8a61-8b20-f1da-b0d636fbd43d}">
           <p14:sldIdLst>
             <p14:sldId id="261"/>
           </p14:sldIdLst>
         </p14:section>
-        <p14:section name="Teach" id="{01dbc74f-613d-abc4-9c6b-20243f36331f}">
+        <p14:section name="Teach" id="{f9bd22fe-00d0-f9fd-f2d0-6e59e552c037}">
           <p14:sldIdLst>
             <p14:sldId id="262"/>
             <p14:sldId id="263"/>
             <p14:sldId id="264"/>
           </p14:sldIdLst>
         </p14:section>
-        <p14:section name="Routes" id="{e437188a-6cbf-8144-65a7-0aa7327a1fad}">
+        <p14:section name="Routes" id="{e3b409a3-6f59-d734-e98a-f331aef5097f}">
           <p14:sldIdLst>
             <p14:sldId id="265"/>
             <p14:sldId id="266"/>
             <p14:sldId id="267"/>
           </p14:sldIdLst>
         </p14:section>
-        <p14:section name="Close" id="{1b24e6a4-05a4-a8d6-9a63-79eff66b1fb6}">
+        <p14:section name="Close" id="{f59bf24d-98a8-4b5e-d71a-47e4adf0b947}">
           <p14:sldIdLst>
             <p14:sldId id="268"/>
           </p14:sldIdLst>
         </p14:section>
-        <p14:section name="Answers" id="{c5449ef4-1f8c-dfb9-b9e0-33b4b09c7bdf}">
+        <p14:section name="Answers" id="{740088cb-8b9d-0875-ad64-b3fa640ed3ea}">
           <p14:sldIdLst>
             <p14:sldId id="269"/>
             <p14:sldId id="270"/>
@@ -1315,7 +1315,7 @@
             <a:r>
               <a:rPr lang="en-US" dirty="0"/>
               <a:t>Do now — retrieval. Silent, no notes, no help: recall comes before any support. Give about four minutes.
-1. Which component has an I–V graph that is a straight line through the origin?  →  C   a resistor at constant temperature
+1. Which component has an I–V graph that is a straight line through the origin?  →  D   a resistor at constant temperature
 2. As the temperature of a thermistor increases, its resistance ___.  →  decreases
 3. The p.d. across a resistor is 4.0 V and the current is 0.50 A. Calculate its resistance in ohms.  →  8 Ω
 Circulate: who gets 3/3 (Stretch route), 2/3 (Core), 0–1 (Support)? Use this to route pupils later in the lesson.</a:t>
@@ -1407,7 +1407,7 @@
             <a:r>
               <a:rPr lang="en-US" dirty="0"/>
               <a:t>Answers — pupils mark their own in a different colour, then hands up for 3/3, 2/3, 1/3.
-1. C   a resistor at constant temperature. A resistor at constant temperature is ohmic: current is directly proportional to p.d., giving a straight line through the origin.
+1. D   a resistor at constant temperature. A resistor at constant temperature is ohmic: current is directly proportional to p.d., giving a straight line through the origin.
 2. decreases. A thermistor's resistance decreases as its temperature increases.
 3. 8 Ω. R = V ÷ I = 4.0 ÷ 0.50 = 8.0 Ω (2 s.f.).
 Say the route each score points to: 3/3 Stretch, 2/3 Core, 0–1 Support. Pupils may choose to move up.</a:t>
@@ -9604,7 +9604,7 @@
                 <a:ea typeface="Calibri" pitchFamily="34" charset="-122"/>
                 <a:cs typeface="Calibri" pitchFamily="34" charset="-120"/>
               </a:rPr>
-              <a:t>a filament lamp</a:t>
+              <a:t>an LDR as the light changes</a:t>
             </a:r>
             <a:endParaRPr lang="en-US" sz="2000" dirty="0"/>
           </a:p>
@@ -9678,7 +9678,7 @@
                 <a:ea typeface="Calibri" pitchFamily="34" charset="-122"/>
                 <a:cs typeface="Calibri" pitchFamily="34" charset="-120"/>
               </a:rPr>
-              <a:t>a resistor at constant temperature</a:t>
+              <a:t>a filament lamp</a:t>
             </a:r>
             <a:endParaRPr lang="en-US" sz="2000" dirty="0"/>
           </a:p>
@@ -9715,7 +9715,7 @@
                 <a:ea typeface="Calibri" pitchFamily="34" charset="-122"/>
                 <a:cs typeface="Calibri" pitchFamily="34" charset="-120"/>
               </a:rPr>
-              <a:t>an LDR as the light changes</a:t>
+              <a:t>a resistor at constant temperature</a:t>
             </a:r>
             <a:endParaRPr lang="en-US" sz="2000" dirty="0"/>
           </a:p>
@@ -10512,7 +10512,7 @@
                 <a:ea typeface="Calibri" pitchFamily="34" charset="-122"/>
                 <a:cs typeface="Calibri" pitchFamily="34" charset="-120"/>
               </a:rPr>
-              <a:t>C   a resistor at constant temperature</a:t>
+              <a:t>D   a resistor at constant temperature</a:t>
             </a:r>
             <a:endParaRPr lang="en-US" sz="2200" dirty="0"/>
           </a:p>

--- a/decks/combined-circuits/combined-circuits_ch4_component-characteristics.pptx
+++ b/decks/combined-circuits/combined-circuits_ch4_component-characteristics.pptx
@@ -122,48 +122,48 @@
   <p:extLst>
     <p:ext uri="{521415D9-36F7-43E2-AB2F-B90AF26B5E84}">
       <p14:sectionLst xmlns:p14="http://schemas.microsoft.com/office/powerpoint/2010/main">
-        <p14:section name="Opening" id="{20d62b8d-4474-2a73-4090-3af0632e4c29}">
+        <p14:section name="Opening" id="{330ffdfc-8346-3b12-6376-eca84d253b75}">
           <p14:sldIdLst>
             <p14:sldId id="256"/>
           </p14:sldIdLst>
         </p14:section>
-        <p14:section name="Gate" id="{5c86df6d-de45-ac54-8b25-0d4957ec001a}">
+        <p14:section name="Gate" id="{48df9d1b-0599-6ddc-d145-7459d46178c5}">
           <p14:sldIdLst>
             <p14:sldId id="257"/>
             <p14:sldId id="258"/>
           </p14:sldIdLst>
         </p14:section>
-        <p14:section name="Pre-teach" id="{284662ee-9ed4-f25f-8cf4-4b41b87f3ec8}">
+        <p14:section name="Pre-teach" id="{edbaf4cb-14cf-42de-9529-0bf8b4937323}">
           <p14:sldIdLst>
             <p14:sldId id="259"/>
             <p14:sldId id="260"/>
           </p14:sldIdLst>
         </p14:section>
-        <p14:section name="Read-along" id="{63bdd54a-8a61-8b20-f1da-b0d636fbd43d}">
+        <p14:section name="Read-along" id="{a4ed450e-59f4-695f-bb19-984ec02ea32c}">
           <p14:sldIdLst>
             <p14:sldId id="261"/>
           </p14:sldIdLst>
         </p14:section>
-        <p14:section name="Teach" id="{f9bd22fe-00d0-f9fd-f2d0-6e59e552c037}">
+        <p14:section name="Teach" id="{e264c3e8-cf1a-f4aa-c2c6-c6a813cc61f5}">
           <p14:sldIdLst>
             <p14:sldId id="262"/>
             <p14:sldId id="263"/>
             <p14:sldId id="264"/>
           </p14:sldIdLst>
         </p14:section>
-        <p14:section name="Routes" id="{e3b409a3-6f59-d734-e98a-f331aef5097f}">
+        <p14:section name="Routes" id="{5d904676-6a3c-f36c-8970-d91db103bf45}">
           <p14:sldIdLst>
             <p14:sldId id="265"/>
             <p14:sldId id="266"/>
             <p14:sldId id="267"/>
           </p14:sldIdLst>
         </p14:section>
-        <p14:section name="Close" id="{f59bf24d-98a8-4b5e-d71a-47e4adf0b947}">
+        <p14:section name="Close" id="{164456f6-4aa0-5dc3-0e1c-7cd1e55d430b}">
           <p14:sldIdLst>
             <p14:sldId id="268"/>
           </p14:sldIdLst>
         </p14:section>
-        <p14:section name="Answers" id="{740088cb-8b9d-0875-ad64-b3fa640ed3ea}">
+        <p14:section name="Answers" id="{bf1f0f17-55a1-9a37-d5e7-195f6fe36412}">
           <p14:sldIdLst>
             <p14:sldId id="269"/>
             <p14:sldId id="270"/>
